--- a/(6.22) 퀘스트의 조건.pptx
+++ b/(6.22) 퀘스트의 조건.pptx
@@ -261,7 +261,7 @@
           <a:p>
             <a:fld id="{596407A5-C924-4487-AE95-7522BAE763C9}" type="datetimeFigureOut">
               <a:rPr lang="ko-KR" altLang="en-US" smtClean="0"/>
-              <a:t>2026-06-22</a:t>
+              <a:t>2026-06-23</a:t>
             </a:fld>
             <a:endParaRPr lang="ko-KR" altLang="en-US"/>
           </a:p>
@@ -431,7 +431,7 @@
           <a:p>
             <a:fld id="{596407A5-C924-4487-AE95-7522BAE763C9}" type="datetimeFigureOut">
               <a:rPr lang="ko-KR" altLang="en-US" smtClean="0"/>
-              <a:t>2026-06-22</a:t>
+              <a:t>2026-06-23</a:t>
             </a:fld>
             <a:endParaRPr lang="ko-KR" altLang="en-US"/>
           </a:p>
@@ -611,7 +611,7 @@
           <a:p>
             <a:fld id="{596407A5-C924-4487-AE95-7522BAE763C9}" type="datetimeFigureOut">
               <a:rPr lang="ko-KR" altLang="en-US" smtClean="0"/>
-              <a:t>2026-06-22</a:t>
+              <a:t>2026-06-23</a:t>
             </a:fld>
             <a:endParaRPr lang="ko-KR" altLang="en-US"/>
           </a:p>
@@ -781,7 +781,7 @@
           <a:p>
             <a:fld id="{596407A5-C924-4487-AE95-7522BAE763C9}" type="datetimeFigureOut">
               <a:rPr lang="ko-KR" altLang="en-US" smtClean="0"/>
-              <a:t>2026-06-22</a:t>
+              <a:t>2026-06-23</a:t>
             </a:fld>
             <a:endParaRPr lang="ko-KR" altLang="en-US"/>
           </a:p>
@@ -1027,7 +1027,7 @@
           <a:p>
             <a:fld id="{596407A5-C924-4487-AE95-7522BAE763C9}" type="datetimeFigureOut">
               <a:rPr lang="ko-KR" altLang="en-US" smtClean="0"/>
-              <a:t>2026-06-22</a:t>
+              <a:t>2026-06-23</a:t>
             </a:fld>
             <a:endParaRPr lang="ko-KR" altLang="en-US"/>
           </a:p>
@@ -1259,7 +1259,7 @@
           <a:p>
             <a:fld id="{596407A5-C924-4487-AE95-7522BAE763C9}" type="datetimeFigureOut">
               <a:rPr lang="ko-KR" altLang="en-US" smtClean="0"/>
-              <a:t>2026-06-22</a:t>
+              <a:t>2026-06-23</a:t>
             </a:fld>
             <a:endParaRPr lang="ko-KR" altLang="en-US"/>
           </a:p>
@@ -1626,7 +1626,7 @@
           <a:p>
             <a:fld id="{596407A5-C924-4487-AE95-7522BAE763C9}" type="datetimeFigureOut">
               <a:rPr lang="ko-KR" altLang="en-US" smtClean="0"/>
-              <a:t>2026-06-22</a:t>
+              <a:t>2026-06-23</a:t>
             </a:fld>
             <a:endParaRPr lang="ko-KR" altLang="en-US"/>
           </a:p>
@@ -1744,7 +1744,7 @@
           <a:p>
             <a:fld id="{596407A5-C924-4487-AE95-7522BAE763C9}" type="datetimeFigureOut">
               <a:rPr lang="ko-KR" altLang="en-US" smtClean="0"/>
-              <a:t>2026-06-22</a:t>
+              <a:t>2026-06-23</a:t>
             </a:fld>
             <a:endParaRPr lang="ko-KR" altLang="en-US"/>
           </a:p>
@@ -1839,7 +1839,7 @@
           <a:p>
             <a:fld id="{596407A5-C924-4487-AE95-7522BAE763C9}" type="datetimeFigureOut">
               <a:rPr lang="ko-KR" altLang="en-US" smtClean="0"/>
-              <a:t>2026-06-22</a:t>
+              <a:t>2026-06-23</a:t>
             </a:fld>
             <a:endParaRPr lang="ko-KR" altLang="en-US"/>
           </a:p>
@@ -2116,7 +2116,7 @@
           <a:p>
             <a:fld id="{596407A5-C924-4487-AE95-7522BAE763C9}" type="datetimeFigureOut">
               <a:rPr lang="ko-KR" altLang="en-US" smtClean="0"/>
-              <a:t>2026-06-22</a:t>
+              <a:t>2026-06-23</a:t>
             </a:fld>
             <a:endParaRPr lang="ko-KR" altLang="en-US"/>
           </a:p>
@@ -2369,7 +2369,7 @@
           <a:p>
             <a:fld id="{596407A5-C924-4487-AE95-7522BAE763C9}" type="datetimeFigureOut">
               <a:rPr lang="ko-KR" altLang="en-US" smtClean="0"/>
-              <a:t>2026-06-22</a:t>
+              <a:t>2026-06-23</a:t>
             </a:fld>
             <a:endParaRPr lang="ko-KR" altLang="en-US"/>
           </a:p>
@@ -2582,7 +2582,7 @@
           <a:p>
             <a:fld id="{596407A5-C924-4487-AE95-7522BAE763C9}" type="datetimeFigureOut">
               <a:rPr lang="ko-KR" altLang="en-US" smtClean="0"/>
-              <a:t>2026-06-22</a:t>
+              <a:t>2026-06-23</a:t>
             </a:fld>
             <a:endParaRPr lang="ko-KR" altLang="en-US"/>
           </a:p>
@@ -4376,11 +4376,7 @@
             </a:r>
             <a:r>
               <a:rPr lang="ko-KR" altLang="en-US"/>
-              <a:t>발동 조건을 많이 </a:t>
-            </a:r>
-            <a:r>
-              <a:rPr lang="ko-KR" altLang="en-US"/>
-              <a:t>표현한다</a:t>
+              <a:t>발동 조건을 많이 표현한다</a:t>
             </a:r>
             <a:r>
               <a:rPr lang="en-US" altLang="ko-KR" smtClean="0"/>
@@ -5529,6 +5525,30 @@
           </a:p>
         </p:txBody>
       </p:sp>
+      <p:pic>
+        <p:nvPicPr>
+          <p:cNvPr id="4" name="그림 3"/>
+          <p:cNvPicPr>
+            <a:picLocks noChangeAspect="1"/>
+          </p:cNvPicPr>
+          <p:nvPr/>
+        </p:nvPicPr>
+        <p:blipFill>
+          <a:blip r:embed="rId2"/>
+          <a:stretch>
+            <a:fillRect/>
+          </a:stretch>
+        </p:blipFill>
+        <p:spPr>
+          <a:xfrm>
+            <a:off x="6713620" y="3263354"/>
+            <a:ext cx="5478379" cy="3594645"/>
+          </a:xfrm>
+          <a:prstGeom prst="rect">
+            <a:avLst/>
+          </a:prstGeom>
+        </p:spPr>
+      </p:pic>
     </p:spTree>
     <p:extLst>
       <p:ext uri="{BB962C8B-B14F-4D97-AF65-F5344CB8AC3E}">
